--- a/public/downloads/US-114050-L3-IT-in-Business.pptx
+++ b/public/downloads/US-114050-L3-IT-in-Business.pptx
@@ -3507,9 +3507,9 @@
             <a:prstDash val="solid"/>
           </a:ln>
           <a:effectLst>
-            <a:outerShdw sx="100000" sy="100000" kx="0" ky="0" algn="bl" rotWithShape="0" blurRad="4.85104960281788e+152" dist="1.38601417223368e+152" dir="5.569789391184891e+178">
+            <a:outerShdw sx="100000" sy="100000" kx="0" ky="0" algn="bl" rotWithShape="0" blurRad="88900" dist="25400" dir="5400000">
               <a:srgbClr val="9AB4CC">
-                <a:alpha val="3e+184"/>
+                <a:alpha val="30000"/>
               </a:srgbClr>
             </a:outerShdw>
           </a:effectLst>
@@ -3830,9 +3830,9 @@
             <a:prstDash val="solid"/>
           </a:ln>
           <a:effectLst>
-            <a:outerShdw sx="100000" sy="100000" kx="0" ky="0" algn="bl" rotWithShape="0" blurRad="6.160832995578707e+156" dist="1.7602379987367734e+156" dir="3.3418736347109347e+183">
+            <a:outerShdw sx="100000" sy="100000" kx="0" ky="0" algn="bl" rotWithShape="0" blurRad="88900" dist="25400" dir="5400000">
               <a:srgbClr val="9AB4CC">
-                <a:alpha val="3e+189"/>
+                <a:alpha val="30000"/>
               </a:srgbClr>
             </a:outerShdw>
           </a:effectLst>
@@ -3978,9 +3978,9 @@
             <a:prstDash val="solid"/>
           </a:ln>
           <a:effectLst>
-            <a:outerShdw sx="100000" sy="100000" kx="0" ky="0" algn="bl" rotWithShape="0" blurRad="7.824257904384958e+160" dist="2.235502258395702e+160" dir="2.0051241808265608e+188">
+            <a:outerShdw sx="100000" sy="100000" kx="0" ky="0" algn="bl" rotWithShape="0" blurRad="88900" dist="25400" dir="5400000">
               <a:srgbClr val="9AB4CC">
-                <a:alpha val="2.9999999999999997e+194"/>
+                <a:alpha val="30000"/>
               </a:srgbClr>
             </a:outerShdw>
           </a:effectLst>
@@ -4126,9 +4126,9 @@
             <a:prstDash val="solid"/>
           </a:ln>
           <a:effectLst>
-            <a:outerShdw sx="100000" sy="100000" kx="0" ky="0" algn="bl" rotWithShape="0" blurRad="9.936807538568897e+164" dist="2.8390878681625417e+164" dir="1.2030745084959364e+193">
+            <a:outerShdw sx="100000" sy="100000" kx="0" ky="0" algn="bl" rotWithShape="0" blurRad="88900" dist="25400" dir="5400000">
               <a:srgbClr val="9AB4CC">
-                <a:alpha val="2.9999999999999997e+199"/>
+                <a:alpha val="30000"/>
               </a:srgbClr>
             </a:outerShdw>
           </a:effectLst>
@@ -4274,9 +4274,9 @@
             <a:prstDash val="solid"/>
           </a:ln>
           <a:effectLst>
-            <a:outerShdw sx="100000" sy="100000" kx="0" ky="0" algn="bl" rotWithShape="0" blurRad="1.26197455739825e+169" dist="3.605641592566428e+168" dir="7.218447050975619e+197">
+            <a:outerShdw sx="100000" sy="100000" kx="0" ky="0" algn="bl" rotWithShape="0" blurRad="88900" dist="25400" dir="5400000">
               <a:srgbClr val="9AB4CC">
-                <a:alpha val="3e+204"/>
+                <a:alpha val="30000"/>
               </a:srgbClr>
             </a:outerShdw>
           </a:effectLst>
@@ -5452,9 +5452,9 @@
             <a:prstDash val="solid"/>
           </a:ln>
           <a:effectLst>
-            <a:outerShdw sx="100000" sy="100000" kx="0" ky="0" algn="bl" rotWithShape="0" blurRad="1.6027076878957775e+173" dist="4.579164822559364e+172" dir="4.3310682305853715e+202">
+            <a:outerShdw sx="100000" sy="100000" kx="0" ky="0" algn="bl" rotWithShape="0" blurRad="88900" dist="25400" dir="5400000">
               <a:srgbClr val="9AB4CC">
-                <a:alpha val="3e+209"/>
+                <a:alpha val="30000"/>
               </a:srgbClr>
             </a:outerShdw>
           </a:effectLst>
@@ -7250,9 +7250,9 @@
             <a:prstDash val="solid"/>
           </a:ln>
           <a:effectLst>
-            <a:outerShdw sx="100000" sy="100000" kx="0" ky="0" algn="bl" rotWithShape="0" blurRad="2.0354387636276376e+177" dist="5.815539324650392e+176" dir="2.598640938351223e+207">
+            <a:outerShdw sx="100000" sy="100000" kx="0" ky="0" algn="bl" rotWithShape="0" blurRad="88900" dist="25400" dir="5400000">
               <a:srgbClr val="9AB4CC">
-                <a:alpha val="2.9999999999999996e+214"/>
+                <a:alpha val="30000"/>
               </a:srgbClr>
             </a:outerShdw>
           </a:effectLst>
@@ -7398,9 +7398,9 @@
             <a:prstDash val="solid"/>
           </a:ln>
           <a:effectLst>
-            <a:outerShdw sx="100000" sy="100000" kx="0" ky="0" algn="bl" rotWithShape="0" blurRad="2.5850072298071e+181" dist="7.385734942305998e+180" dir="1.5591845630107338e+212">
+            <a:outerShdw sx="100000" sy="100000" kx="0" ky="0" algn="bl" rotWithShape="0" blurRad="88900" dist="25400" dir="5400000">
               <a:srgbClr val="9AB4CC">
-                <a:alpha val="3e+219"/>
+                <a:alpha val="30000"/>
               </a:srgbClr>
             </a:outerShdw>
           </a:effectLst>
@@ -7546,9 +7546,9 @@
             <a:prstDash val="solid"/>
           </a:ln>
           <a:effectLst>
-            <a:outerShdw sx="100000" sy="100000" kx="0" ky="0" algn="bl" rotWithShape="0" blurRad="3.282959181855017e+185" dist="9.379883376728618e+184" dir="9.355107378064403e+216">
+            <a:outerShdw sx="100000" sy="100000" kx="0" ky="0" algn="bl" rotWithShape="0" blurRad="88900" dist="25400" dir="5400000">
               <a:srgbClr val="9AB4CC">
-                <a:alpha val="2.9999999999999997e+224"/>
+                <a:alpha val="30000"/>
               </a:srgbClr>
             </a:outerShdw>
           </a:effectLst>
@@ -7694,9 +7694,9 @@
             <a:prstDash val="solid"/>
           </a:ln>
           <a:effectLst>
-            <a:outerShdw sx="100000" sy="100000" kx="0" ky="0" algn="bl" rotWithShape="0" blurRad="4.1693581609558713e+189" dist="1.1912451888445345e+189" dir="5.613064426838642e+221">
+            <a:outerShdw sx="100000" sy="100000" kx="0" ky="0" algn="bl" rotWithShape="0" blurRad="88900" dist="25400" dir="5400000">
               <a:srgbClr val="9AB4CC">
-                <a:alpha val="2.9999999999999994e+229"/>
+                <a:alpha val="30000"/>
               </a:srgbClr>
             </a:outerShdw>
           </a:effectLst>
@@ -8791,9 +8791,9 @@
             <a:prstDash val="solid"/>
           </a:ln>
           <a:effectLst>
-            <a:outerShdw sx="100000" sy="100000" kx="0" ky="0" algn="bl" rotWithShape="0" blurRad="1129030000" dist="322580000" dir="324000000000">
+            <a:outerShdw sx="100000" sy="100000" kx="0" ky="0" algn="bl" rotWithShape="0" blurRad="88900" dist="25400" dir="5400000">
               <a:srgbClr val="9AB4CC">
-                <a:alpha val="3000000000"/>
+                <a:alpha val="30000"/>
               </a:srgbClr>
             </a:outerShdw>
           </a:effectLst>
@@ -8939,9 +8939,9 @@
             <a:prstDash val="solid"/>
           </a:ln>
           <a:effectLst>
-            <a:outerShdw sx="100000" sy="100000" kx="0" ky="0" algn="bl" rotWithShape="0" blurRad="14338681000000" dist="4096766000000" dir="19440000000000000">
+            <a:outerShdw sx="100000" sy="100000" kx="0" ky="0" algn="bl" rotWithShape="0" blurRad="88900" dist="25400" dir="5400000">
               <a:srgbClr val="9AB4CC">
-                <a:alpha val="300000000000000"/>
+                <a:alpha val="30000"/>
               </a:srgbClr>
             </a:outerShdw>
           </a:effectLst>
@@ -9087,9 +9087,9 @@
             <a:prstDash val="solid"/>
           </a:ln>
           <a:effectLst>
-            <a:outerShdw sx="100000" sy="100000" kx="0" ky="0" algn="bl" rotWithShape="0" blurRad="182101248700000000" dist="52028928200000000" dir="1.1664e+21">
+            <a:outerShdw sx="100000" sy="100000" kx="0" ky="0" algn="bl" rotWithShape="0" blurRad="88900" dist="25400" dir="5400000">
               <a:srgbClr val="9AB4CC">
-                <a:alpha val="30000000000000000000"/>
+                <a:alpha val="30000"/>
               </a:srgbClr>
             </a:outerShdw>
           </a:effectLst>
@@ -9235,9 +9235,9 @@
             <a:prstDash val="solid"/>
           </a:ln>
           <a:effectLst>
-            <a:outerShdw sx="100000" sy="100000" kx="0" ky="0" algn="bl" rotWithShape="0" blurRad="2.31268585849e+21" dist="660767388140000000000" dir="6.9984e+25">
+            <a:outerShdw sx="100000" sy="100000" kx="0" ky="0" algn="bl" rotWithShape="0" blurRad="88900" dist="25400" dir="5400000">
               <a:srgbClr val="9AB4CC">
-                <a:alpha val="3e+24"/>
+                <a:alpha val="30000"/>
               </a:srgbClr>
             </a:outerShdw>
           </a:effectLst>
@@ -9383,9 +9383,9 @@
             <a:prstDash val="solid"/>
           </a:ln>
           <a:effectLst>
-            <a:outerShdw sx="100000" sy="100000" kx="0" ky="0" algn="bl" rotWithShape="0" blurRad="2.9371110402823e+25" dist="8.391745829378e+24" dir="4.19904e+30">
+            <a:outerShdw sx="100000" sy="100000" kx="0" ky="0" algn="bl" rotWithShape="0" blurRad="88900" dist="25400" dir="5400000">
               <a:srgbClr val="9AB4CC">
-                <a:alpha val="3e+29"/>
+                <a:alpha val="30000"/>
               </a:srgbClr>
             </a:outerShdw>
           </a:effectLst>
@@ -9531,9 +9531,9 @@
             <a:prstDash val="solid"/>
           </a:ln>
           <a:effectLst>
-            <a:outerShdw sx="100000" sy="100000" kx="0" ky="0" algn="bl" rotWithShape="0" blurRad="3.730131021158521e+29" dist="1.0657517203310059e+29" dir="2.519424e+35">
+            <a:outerShdw sx="100000" sy="100000" kx="0" ky="0" algn="bl" rotWithShape="0" blurRad="88900" dist="25400" dir="5400000">
               <a:srgbClr val="9AB4CC">
-                <a:alpha val="2.9999999999999997e+34"/>
+                <a:alpha val="30000"/>
               </a:srgbClr>
             </a:outerShdw>
           </a:effectLst>
@@ -9679,9 +9679,9 @@
             <a:prstDash val="solid"/>
           </a:ln>
           <a:effectLst>
-            <a:outerShdw sx="100000" sy="100000" kx="0" ky="0" algn="bl" rotWithShape="0" blurRad="4.737266396871321e+33" dist="1.3535046848203775e+33" dir="1.5116544e+40">
+            <a:outerShdw sx="100000" sy="100000" kx="0" ky="0" algn="bl" rotWithShape="0" blurRad="88900" dist="25400" dir="5400000">
               <a:srgbClr val="9AB4CC">
-                <a:alpha val="3e+39"/>
+                <a:alpha val="30000"/>
               </a:srgbClr>
             </a:outerShdw>
           </a:effectLst>
@@ -9827,9 +9827,9 @@
             <a:prstDash val="solid"/>
           </a:ln>
           <a:effectLst>
-            <a:outerShdw sx="100000" sy="100000" kx="0" ky="0" algn="bl" rotWithShape="0" blurRad="6.016328324026578e+37" dist="1.7189509497218795e+37" dir="9.069926400000001e+44">
+            <a:outerShdw sx="100000" sy="100000" kx="0" ky="0" algn="bl" rotWithShape="0" blurRad="88900" dist="25400" dir="5400000">
               <a:srgbClr val="9AB4CC">
-                <a:alpha val="3e+44"/>
+                <a:alpha val="30000"/>
               </a:srgbClr>
             </a:outerShdw>
           </a:effectLst>
@@ -9975,9 +9975,9 @@
             <a:prstDash val="solid"/>
           </a:ln>
           <a:effectLst>
-            <a:outerShdw sx="100000" sy="100000" kx="0" ky="0" algn="bl" rotWithShape="0" blurRad="7.640736971513755e+41" dist="2.183067706146787e+41" dir="5.44195584e+49">
+            <a:outerShdw sx="100000" sy="100000" kx="0" ky="0" algn="bl" rotWithShape="0" blurRad="88900" dist="25400" dir="5400000">
               <a:srgbClr val="9AB4CC">
-                <a:alpha val="2.9999999999999997e+49"/>
+                <a:alpha val="30000"/>
               </a:srgbClr>
             </a:outerShdw>
           </a:effectLst>
@@ -10298,9 +10298,9 @@
             <a:prstDash val="solid"/>
           </a:ln>
           <a:effectLst>
-            <a:outerShdw sx="100000" sy="100000" kx="0" ky="0" algn="bl" rotWithShape="0" blurRad="9.703735953822469e+45" dist="2.7724959868064195e+45" dir="3.2651735040000005e+54">
+            <a:outerShdw sx="100000" sy="100000" kx="0" ky="0" algn="bl" rotWithShape="0" blurRad="88900" dist="25400" dir="5400000">
               <a:srgbClr val="9AB4CC">
-                <a:alpha val="2.9999999999999996e+54"/>
+                <a:alpha val="30000"/>
               </a:srgbClr>
             </a:outerShdw>
           </a:effectLst>
@@ -10446,9 +10446,9 @@
             <a:prstDash val="solid"/>
           </a:ln>
           <a:effectLst>
-            <a:outerShdw sx="100000" sy="100000" kx="0" ky="0" algn="bl" rotWithShape="0" blurRad="1.2323744661354536e+50" dist="3.5210699032441527e+49" dir="1.9591041024000004e+59">
+            <a:outerShdw sx="100000" sy="100000" kx="0" ky="0" algn="bl" rotWithShape="0" blurRad="88900" dist="25400" dir="5400000">
               <a:srgbClr val="9AB4CC">
-                <a:alpha val="2.9999999999999996e+59"/>
+                <a:alpha val="30000"/>
               </a:srgbClr>
             </a:outerShdw>
           </a:effectLst>
@@ -10594,9 +10594,9 @@
             <a:prstDash val="solid"/>
           </a:ln>
           <a:effectLst>
-            <a:outerShdw sx="100000" sy="100000" kx="0" ky="0" algn="bl" rotWithShape="0" blurRad="1.5651155719920262e+54" dist="4.471758777120074e+53" dir="1.1754624614400003e+64">
+            <a:outerShdw sx="100000" sy="100000" kx="0" ky="0" algn="bl" rotWithShape="0" blurRad="88900" dist="25400" dir="5400000">
               <a:srgbClr val="9AB4CC">
-                <a:alpha val="2.9999999999999996e+64"/>
+                <a:alpha val="30000"/>
               </a:srgbClr>
             </a:outerShdw>
           </a:effectLst>
@@ -10742,9 +10742,9 @@
             <a:prstDash val="solid"/>
           </a:ln>
           <a:effectLst>
-            <a:outerShdw sx="100000" sy="100000" kx="0" ky="0" algn="bl" rotWithShape="0" blurRad="1.9876967764298733e+58" dist="5.679133646942494e+57" dir="7.052774768640002e+68">
+            <a:outerShdw sx="100000" sy="100000" kx="0" ky="0" algn="bl" rotWithShape="0" blurRad="88900" dist="25400" dir="5400000">
               <a:srgbClr val="9AB4CC">
-                <a:alpha val="2.9999999999999995e+69"/>
+                <a:alpha val="30000"/>
               </a:srgbClr>
             </a:outerShdw>
           </a:effectLst>
@@ -10890,9 +10890,9 @@
             <a:prstDash val="solid"/>
           </a:ln>
           <a:effectLst>
-            <a:outerShdw sx="100000" sy="100000" kx="0" ky="0" algn="bl" rotWithShape="0" blurRad="2.524374906065939e+62" dist="7.212499731616968e+61" dir="4.2316648611840007e+73">
+            <a:outerShdw sx="100000" sy="100000" kx="0" ky="0" algn="bl" rotWithShape="0" blurRad="88900" dist="25400" dir="5400000">
               <a:srgbClr val="9AB4CC">
-                <a:alpha val="2.9999999999999995e+74"/>
+                <a:alpha val="30000"/>
               </a:srgbClr>
             </a:outerShdw>
           </a:effectLst>
@@ -11038,9 +11038,9 @@
             <a:prstDash val="solid"/>
           </a:ln>
           <a:effectLst>
-            <a:outerShdw sx="100000" sy="100000" kx="0" ky="0" algn="bl" rotWithShape="0" blurRad="3.2059561307037426e+66" dist="9.15987465915355e+65" dir="2.5389989167104004e+78">
+            <a:outerShdw sx="100000" sy="100000" kx="0" ky="0" algn="bl" rotWithShape="0" blurRad="88900" dist="25400" dir="5400000">
               <a:srgbClr val="9AB4CC">
-                <a:alpha val="3e+79"/>
+                <a:alpha val="30000"/>
               </a:srgbClr>
             </a:outerShdw>
           </a:effectLst>
@@ -11186,9 +11186,9 @@
             <a:prstDash val="solid"/>
           </a:ln>
           <a:effectLst>
-            <a:outerShdw sx="100000" sy="100000" kx="0" ky="0" algn="bl" rotWithShape="0" blurRad="4.071564285993753e+70" dist="1.1633040817125008e+70" dir="1.5233993500262402e+83">
+            <a:outerShdw sx="100000" sy="100000" kx="0" ky="0" algn="bl" rotWithShape="0" blurRad="88900" dist="25400" dir="5400000">
               <a:srgbClr val="9AB4CC">
-                <a:alpha val="2.9999999999999995e+84"/>
+                <a:alpha val="30000"/>
               </a:srgbClr>
             </a:outerShdw>
           </a:effectLst>
@@ -11627,9 +11627,9 @@
             <a:prstDash val="solid"/>
           </a:ln>
           <a:effectLst>
-            <a:outerShdw sx="100000" sy="100000" kx="0" ky="0" algn="bl" rotWithShape="0" blurRad="5.170886643212067e+74" dist="1.477396183774876e+74" dir="9.14039610015744e+87">
+            <a:outerShdw sx="100000" sy="100000" kx="0" ky="0" algn="bl" rotWithShape="0" blurRad="88900" dist="25400" dir="5400000">
               <a:srgbClr val="9AB4CC">
-                <a:alpha val="2.9999999999999996e+89"/>
+                <a:alpha val="30000"/>
               </a:srgbClr>
             </a:outerShdw>
           </a:effectLst>
@@ -12068,9 +12068,9 @@
             <a:prstDash val="solid"/>
           </a:ln>
           <a:effectLst>
-            <a:outerShdw sx="100000" sy="100000" kx="0" ky="0" algn="bl" rotWithShape="0" blurRad="6.567026036879325e+78" dist="1.8762931533940924e+78" dir="5.484237660094465e+92">
+            <a:outerShdw sx="100000" sy="100000" kx="0" ky="0" algn="bl" rotWithShape="0" blurRad="88900" dist="25400" dir="5400000">
               <a:srgbClr val="9AB4CC">
-                <a:alpha val="2.9999999999999997e+94"/>
+                <a:alpha val="30000"/>
               </a:srgbClr>
             </a:outerShdw>
           </a:effectLst>
@@ -12391,9 +12391,9 @@
             <a:prstDash val="solid"/>
           </a:ln>
           <a:effectLst>
-            <a:outerShdw sx="100000" sy="100000" kx="0" ky="0" algn="bl" rotWithShape="0" blurRad="8.340123066836742e+82" dist="2.3828923048104974e+82" dir="3.2905425960566786e+97">
+            <a:outerShdw sx="100000" sy="100000" kx="0" ky="0" algn="bl" rotWithShape="0" blurRad="88900" dist="25400" dir="5400000">
               <a:srgbClr val="9AB4CC">
-                <a:alpha val="2.9999999999999997e+99"/>
+                <a:alpha val="30000"/>
               </a:srgbClr>
             </a:outerShdw>
           </a:effectLst>
@@ -12539,9 +12539,9 @@
             <a:prstDash val="solid"/>
           </a:ln>
           <a:effectLst>
-            <a:outerShdw sx="100000" sy="100000" kx="0" ky="0" algn="bl" rotWithShape="0" blurRad="1.0591956294882662e+87" dist="3.0262732271093317e+86" dir="1.9743255576340073e+102">
+            <a:outerShdw sx="100000" sy="100000" kx="0" ky="0" algn="bl" rotWithShape="0" blurRad="88900" dist="25400" dir="5400000">
               <a:srgbClr val="9AB4CC">
-                <a:alpha val="3e+104"/>
+                <a:alpha val="30000"/>
               </a:srgbClr>
             </a:outerShdw>
           </a:effectLst>
@@ -12687,9 +12687,9 @@
             <a:prstDash val="solid"/>
           </a:ln>
           <a:effectLst>
-            <a:outerShdw sx="100000" sy="100000" kx="0" ky="0" algn="bl" rotWithShape="0" blurRad="1.3451784494500981e+91" dist="3.8433669984288512e+90" dir="1.1845953345804043e+107">
+            <a:outerShdw sx="100000" sy="100000" kx="0" ky="0" algn="bl" rotWithShape="0" blurRad="88900" dist="25400" dir="5400000">
               <a:srgbClr val="9AB4CC">
-                <a:alpha val="2.9999999999999997e+109"/>
+                <a:alpha val="30000"/>
               </a:srgbClr>
             </a:outerShdw>
           </a:effectLst>
@@ -12835,9 +12835,9 @@
             <a:prstDash val="solid"/>
           </a:ln>
           <a:effectLst>
-            <a:outerShdw sx="100000" sy="100000" kx="0" ky="0" algn="bl" rotWithShape="0" blurRad="1.7083766308016246e+95" dist="4.8810760880046414e+94" dir="7.107572007482426e+111">
+            <a:outerShdw sx="100000" sy="100000" kx="0" ky="0" algn="bl" rotWithShape="0" blurRad="88900" dist="25400" dir="5400000">
               <a:srgbClr val="9AB4CC">
-                <a:alpha val="2.9999999999999995e+114"/>
+                <a:alpha val="30000"/>
               </a:srgbClr>
             </a:outerShdw>
           </a:effectLst>
@@ -12983,9 +12983,9 @@
             <a:prstDash val="solid"/>
           </a:ln>
           <a:effectLst>
-            <a:outerShdw sx="100000" sy="100000" kx="0" ky="0" algn="bl" rotWithShape="0" blurRad="2.1696383211180632e+99" dist="6.198966631765894e+98" dir="4.2645432044894554e+116">
+            <a:outerShdw sx="100000" sy="100000" kx="0" ky="0" algn="bl" rotWithShape="0" blurRad="88900" dist="25400" dir="5400000">
               <a:srgbClr val="9AB4CC">
-                <a:alpha val="2.9999999999999997e+119"/>
+                <a:alpha val="30000"/>
               </a:srgbClr>
             </a:outerShdw>
           </a:effectLst>
@@ -13131,9 +13131,9 @@
             <a:prstDash val="solid"/>
           </a:ln>
           <a:effectLst>
-            <a:outerShdw sx="100000" sy="100000" kx="0" ky="0" algn="bl" rotWithShape="0" blurRad="2.7554406678199403e+103" dist="7.872687622342685e+102" dir="2.5587259226936733e+121">
+            <a:outerShdw sx="100000" sy="100000" kx="0" ky="0" algn="bl" rotWithShape="0" blurRad="88900" dist="25400" dir="5400000">
               <a:srgbClr val="9AB4CC">
-                <a:alpha val="2.9999999999999995e+124"/>
+                <a:alpha val="30000"/>
               </a:srgbClr>
             </a:outerShdw>
           </a:effectLst>
@@ -13487,9 +13487,9 @@
             <a:prstDash val="solid"/>
           </a:ln>
           <a:effectLst>
-            <a:outerShdw sx="100000" sy="100000" kx="0" ky="0" algn="bl" rotWithShape="0" blurRad="3.499409648131324e+107" dist="9.998313280375211e+106" dir="1.535235553616204e+126">
+            <a:outerShdw sx="100000" sy="100000" kx="0" ky="0" algn="bl" rotWithShape="0" blurRad="88900" dist="25400" dir="5400000">
               <a:srgbClr val="9AB4CC">
-                <a:alpha val="2.9999999999999997e+129"/>
+                <a:alpha val="30000"/>
               </a:srgbClr>
             </a:outerShdw>
           </a:effectLst>
@@ -13635,9 +13635,9 @@
             <a:prstDash val="solid"/>
           </a:ln>
           <a:effectLst>
-            <a:outerShdw sx="100000" sy="100000" kx="0" ky="0" algn="bl" rotWithShape="0" blurRad="4.4442502531267815e+111" dist="1.2697857866076517e+111" dir="9.211413321697224e+130">
+            <a:outerShdw sx="100000" sy="100000" kx="0" ky="0" algn="bl" rotWithShape="0" blurRad="88900" dist="25400" dir="5400000">
               <a:srgbClr val="9AB4CC">
-                <a:alpha val="2.9999999999999996e+134"/>
+                <a:alpha val="30000"/>
               </a:srgbClr>
             </a:outerShdw>
           </a:effectLst>
@@ -13783,9 +13783,9 @@
             <a:prstDash val="solid"/>
           </a:ln>
           <a:effectLst>
-            <a:outerShdw sx="100000" sy="100000" kx="0" ky="0" algn="bl" rotWithShape="0" blurRad="5.644197821471012e+115" dist="1.6126279489917177e+115" dir="5.526847993018334e+135">
+            <a:outerShdw sx="100000" sy="100000" kx="0" ky="0" algn="bl" rotWithShape="0" blurRad="88900" dist="25400" dir="5400000">
               <a:srgbClr val="9AB4CC">
-                <a:alpha val="2.9999999999999994e+139"/>
+                <a:alpha val="30000"/>
               </a:srgbClr>
             </a:outerShdw>
           </a:effectLst>
@@ -13931,9 +13931,9 @@
             <a:prstDash val="solid"/>
           </a:ln>
           <a:effectLst>
-            <a:outerShdw sx="100000" sy="100000" kx="0" ky="0" algn="bl" rotWithShape="0" blurRad="7.168131233268186e+119" dist="2.0480374952194813e+119" dir="3.3161087958110005e+140">
+            <a:outerShdw sx="100000" sy="100000" kx="0" ky="0" algn="bl" rotWithShape="0" blurRad="88900" dist="25400" dir="5400000">
               <a:srgbClr val="9AB4CC">
-                <a:alpha val="2.9999999999999996e+144"/>
+                <a:alpha val="30000"/>
               </a:srgbClr>
             </a:outerShdw>
           </a:effectLst>
@@ -14079,9 +14079,9 @@
             <a:prstDash val="solid"/>
           </a:ln>
           <a:effectLst>
-            <a:outerShdw sx="100000" sy="100000" kx="0" ky="0" algn="bl" rotWithShape="0" blurRad="9.103526666250596e+123" dist="2.6010076189287412e+123" dir="1.9896652774866004e+145">
+            <a:outerShdw sx="100000" sy="100000" kx="0" ky="0" algn="bl" rotWithShape="0" blurRad="88900" dist="25400" dir="5400000">
               <a:srgbClr val="9AB4CC">
-                <a:alpha val="2.9999999999999996e+149"/>
+                <a:alpha val="30000"/>
               </a:srgbClr>
             </a:outerShdw>
           </a:effectLst>
@@ -14402,9 +14402,9 @@
             <a:prstDash val="solid"/>
           </a:ln>
           <a:effectLst>
-            <a:outerShdw sx="100000" sy="100000" kx="0" ky="0" algn="bl" rotWithShape="0" blurRad="1.1561478866138256e+128" dist="3.303279676039501e+127" dir="1.1937991664919603e+150">
+            <a:outerShdw sx="100000" sy="100000" kx="0" ky="0" algn="bl" rotWithShape="0" blurRad="88900" dist="25400" dir="5400000">
               <a:srgbClr val="9AB4CC">
-                <a:alpha val="2.9999999999999997e+154"/>
+                <a:alpha val="30000"/>
               </a:srgbClr>
             </a:outerShdw>
           </a:effectLst>
@@ -14543,9 +14543,9 @@
             <a:prstDash val="solid"/>
           </a:ln>
           <a:effectLst>
-            <a:outerShdw sx="100000" sy="100000" kx="0" ky="0" algn="bl" rotWithShape="0" blurRad="1.4683078159995586e+132" dist="4.195165188570166e+131" dir="7.162794998951762e+154">
+            <a:outerShdw sx="100000" sy="100000" kx="0" ky="0" algn="bl" rotWithShape="0" blurRad="88900" dist="25400" dir="5400000">
               <a:srgbClr val="9AB4CC">
-                <a:alpha val="2.9999999999999998e+159"/>
+                <a:alpha val="30000"/>
               </a:srgbClr>
             </a:outerShdw>
           </a:effectLst>
@@ -14684,9 +14684,9 @@
             <a:prstDash val="solid"/>
           </a:ln>
           <a:effectLst>
-            <a:outerShdw sx="100000" sy="100000" kx="0" ky="0" algn="bl" rotWithShape="0" blurRad="1.8647509263194394e+136" dist="5.327859789484111e+135" dir="4.297676999371057e+159">
+            <a:outerShdw sx="100000" sy="100000" kx="0" ky="0" algn="bl" rotWithShape="0" blurRad="88900" dist="25400" dir="5400000">
               <a:srgbClr val="9AB4CC">
-                <a:alpha val="3e+164"/>
+                <a:alpha val="30000"/>
               </a:srgbClr>
             </a:outerShdw>
           </a:effectLst>
@@ -14825,9 +14825,9 @@
             <a:prstDash val="solid"/>
           </a:ln>
           <a:effectLst>
-            <a:outerShdw sx="100000" sy="100000" kx="0" ky="0" algn="bl" rotWithShape="0" blurRad="2.368233676425688e+140" dist="6.766381932644821e+139" dir="2.5786061996226343e+164">
+            <a:outerShdw sx="100000" sy="100000" kx="0" ky="0" algn="bl" rotWithShape="0" blurRad="88900" dist="25400" dir="5400000">
               <a:srgbClr val="9AB4CC">
-                <a:alpha val="3e+169"/>
+                <a:alpha val="30000"/>
               </a:srgbClr>
             </a:outerShdw>
           </a:effectLst>
@@ -14966,9 +14966,9 @@
             <a:prstDash val="solid"/>
           </a:ln>
           <a:effectLst>
-            <a:outerShdw sx="100000" sy="100000" kx="0" ky="0" algn="bl" rotWithShape="0" blurRad="3.0076567690606238e+144" dist="8.593305054458923e+143" dir="1.5471637197735807e+169">
+            <a:outerShdw sx="100000" sy="100000" kx="0" ky="0" algn="bl" rotWithShape="0" blurRad="88900" dist="25400" dir="5400000">
               <a:srgbClr val="9AB4CC">
-                <a:alpha val="3e+174"/>
+                <a:alpha val="30000"/>
               </a:srgbClr>
             </a:outerShdw>
           </a:effectLst>
@@ -15107,9 +15107,9 @@
             <a:prstDash val="solid"/>
           </a:ln>
           <a:effectLst>
-            <a:outerShdw sx="100000" sy="100000" kx="0" ky="0" algn="bl" rotWithShape="0" blurRad="3.819724096706992e+148" dist="1.0913497419162833e+148" dir="9.282982318641485e+173">
+            <a:outerShdw sx="100000" sy="100000" kx="0" ky="0" algn="bl" rotWithShape="0" blurRad="88900" dist="25400" dir="5400000">
               <a:srgbClr val="9AB4CC">
-                <a:alpha val="3e+179"/>
+                <a:alpha val="30000"/>
               </a:srgbClr>
             </a:outerShdw>
           </a:effectLst>
